--- a/coastal-17-market-update.pptx
+++ b/coastal-17-market-update.pptx
@@ -3317,7 +3317,7 @@
         <p:spPr>
           <a:xfrm>
             <a:off x="762000" y="6286500"/>
-            <a:ext cx="8763000" cy="1428750"/>
+            <a:ext cx="8763000" cy="1562100"/>
           </a:xfrm>
           <a:prstGeom prst="rect">
             <a:avLst/>
@@ -3404,7 +3404,7 @@
         </p:nvSpPr>
         <p:spPr>
           <a:xfrm>
-            <a:off x="762000" y="7705725"/>
+            <a:off x="762000" y="7839075"/>
             <a:ext cx="8763000" cy="9525"/>
           </a:xfrm>
           <a:prstGeom prst="rect">
@@ -3449,7 +3449,7 @@
         <p:spPr>
           <a:xfrm>
             <a:off x="762000" y="6286500"/>
-            <a:ext cx="9525" cy="1428750"/>
+            <a:ext cx="9525" cy="1562100"/>
           </a:xfrm>
           <a:prstGeom prst="rect">
             <a:avLst/>
@@ -3493,7 +3493,7 @@
         <p:spPr>
           <a:xfrm>
             <a:off x="9515475" y="6286500"/>
-            <a:ext cx="9525" cy="1428750"/>
+            <a:ext cx="9525" cy="1562100"/>
           </a:xfrm>
           <a:prstGeom prst="rect">
             <a:avLst/>
@@ -3536,8 +3536,8 @@
         </p:nvSpPr>
         <p:spPr>
           <a:xfrm>
-            <a:off x="762000" y="7924800"/>
-            <a:ext cx="8763000" cy="1428750"/>
+            <a:off x="762000" y="8058150"/>
+            <a:ext cx="8763000" cy="1562100"/>
           </a:xfrm>
           <a:prstGeom prst="rect">
             <a:avLst/>
@@ -3580,7 +3580,7 @@
         </p:nvSpPr>
         <p:spPr>
           <a:xfrm>
-            <a:off x="762000" y="7924800"/>
+            <a:off x="762000" y="8058150"/>
             <a:ext cx="8763000" cy="9525"/>
           </a:xfrm>
           <a:prstGeom prst="rect">
@@ -3624,7 +3624,7 @@
         </p:nvSpPr>
         <p:spPr>
           <a:xfrm>
-            <a:off x="762000" y="9344025"/>
+            <a:off x="762000" y="9610725"/>
             <a:ext cx="8763000" cy="9525"/>
           </a:xfrm>
           <a:prstGeom prst="rect">
@@ -3668,8 +3668,8 @@
         </p:nvSpPr>
         <p:spPr>
           <a:xfrm>
-            <a:off x="762000" y="7924800"/>
-            <a:ext cx="9525" cy="1428750"/>
+            <a:off x="762000" y="8058150"/>
+            <a:ext cx="9525" cy="1562100"/>
           </a:xfrm>
           <a:prstGeom prst="rect">
             <a:avLst/>
@@ -3712,8 +3712,8 @@
         </p:nvSpPr>
         <p:spPr>
           <a:xfrm>
-            <a:off x="9515475" y="7924800"/>
-            <a:ext cx="9525" cy="1428750"/>
+            <a:off x="9515475" y="8058150"/>
+            <a:ext cx="9525" cy="1562100"/>
           </a:xfrm>
           <a:prstGeom prst="rect">
             <a:avLst/>
@@ -3756,8 +3756,8 @@
         </p:nvSpPr>
         <p:spPr>
           <a:xfrm>
-            <a:off x="762000" y="9563100"/>
-            <a:ext cx="8763000" cy="1428750"/>
+            <a:off x="762000" y="9829800"/>
+            <a:ext cx="8763000" cy="1562100"/>
           </a:xfrm>
           <a:prstGeom prst="rect">
             <a:avLst/>
@@ -3800,7 +3800,7 @@
         </p:nvSpPr>
         <p:spPr>
           <a:xfrm>
-            <a:off x="762000" y="9563100"/>
+            <a:off x="762000" y="9829800"/>
             <a:ext cx="8763000" cy="9525"/>
           </a:xfrm>
           <a:prstGeom prst="rect">
@@ -3844,7 +3844,7 @@
         </p:nvSpPr>
         <p:spPr>
           <a:xfrm>
-            <a:off x="762000" y="10982325"/>
+            <a:off x="762000" y="11382375"/>
             <a:ext cx="8763000" cy="9525"/>
           </a:xfrm>
           <a:prstGeom prst="rect">
@@ -3888,8 +3888,8 @@
         </p:nvSpPr>
         <p:spPr>
           <a:xfrm>
-            <a:off x="762000" y="9563100"/>
-            <a:ext cx="9525" cy="1428750"/>
+            <a:off x="762000" y="9829800"/>
+            <a:ext cx="9525" cy="1562100"/>
           </a:xfrm>
           <a:prstGeom prst="rect">
             <a:avLst/>
@@ -3932,8 +3932,8 @@
         </p:nvSpPr>
         <p:spPr>
           <a:xfrm>
-            <a:off x="9515475" y="9563100"/>
-            <a:ext cx="9525" cy="1428750"/>
+            <a:off x="9515475" y="9829800"/>
+            <a:ext cx="9525" cy="1562100"/>
           </a:xfrm>
           <a:prstGeom prst="rect">
             <a:avLst/>
@@ -3976,8 +3976,8 @@
         </p:nvSpPr>
         <p:spPr>
           <a:xfrm>
-            <a:off x="762000" y="15840075"/>
-            <a:ext cx="3503116" cy="9525"/>
+            <a:off x="762000" y="15621000"/>
+            <a:ext cx="4922788" cy="9525"/>
           </a:xfrm>
           <a:prstGeom prst="rect">
             <a:avLst/>
@@ -4021,7 +4021,7 @@
         <p:spPr>
           <a:xfrm>
             <a:off x="762000" y="16373475"/>
-            <a:ext cx="3503116" cy="9525"/>
+            <a:ext cx="4922788" cy="9525"/>
           </a:xfrm>
           <a:prstGeom prst="rect">
             <a:avLst/>
@@ -4064,8 +4064,8 @@
         </p:nvSpPr>
         <p:spPr>
           <a:xfrm>
-            <a:off x="762000" y="15840075"/>
-            <a:ext cx="9525" cy="542925"/>
+            <a:off x="762000" y="15621000"/>
+            <a:ext cx="9525" cy="762000"/>
           </a:xfrm>
           <a:prstGeom prst="rect">
             <a:avLst/>
@@ -4108,8 +4108,8 @@
         </p:nvSpPr>
         <p:spPr>
           <a:xfrm>
-            <a:off x="4255591" y="15840075"/>
-            <a:ext cx="9525" cy="542925"/>
+            <a:off x="5675263" y="15621000"/>
+            <a:ext cx="9525" cy="762000"/>
           </a:xfrm>
           <a:prstGeom prst="rect">
             <a:avLst/>
@@ -4152,7 +4152,7 @@
         </p:nvSpPr>
         <p:spPr>
           <a:xfrm>
-            <a:off x="1041493" y="16057656"/>
+            <a:off x="1079593" y="15948118"/>
             <a:ext cx="107763" cy="107763"/>
           </a:xfrm>
           <a:prstGeom prst="rect">
@@ -4235,8 +4235,8 @@
         </p:nvSpPr>
         <p:spPr>
           <a:xfrm>
-            <a:off x="7436793" y="938212"/>
-            <a:ext cx="3722132" cy="104775"/>
+            <a:off x="6257032" y="904875"/>
+            <a:ext cx="5609749" cy="171450"/>
           </a:xfrm>
           <a:prstGeom prst="rect">
             <a:avLst/>
@@ -4249,7 +4249,7 @@
           <a:p>
             <a:pPr algn="l"/>
             <a:r>
-              <a:rPr sz="750" i="0" b="1" spc="240">
+              <a:rPr sz="1200" i="0" b="1" spc="360">
                 <a:solidFill>
                   <a:srgbClr val="332C46"/>
                 </a:solidFill>
@@ -4271,7 +4271,7 @@
         <p:spPr>
           <a:xfrm>
             <a:off x="762000" y="2190750"/>
-            <a:ext cx="14401800" cy="142875"/>
+            <a:ext cx="14401800" cy="228600"/>
           </a:xfrm>
           <a:prstGeom prst="rect">
             <a:avLst/>
@@ -4284,7 +4284,7 @@
           <a:p>
             <a:pPr algn="l"/>
             <a:r>
-              <a:rPr sz="975" i="0" b="1" spc="351">
+              <a:rPr sz="1575" i="0" b="1" spc="472">
                 <a:solidFill>
                   <a:srgbClr val="A98BA6"/>
                 </a:solidFill>
@@ -4305,7 +4305,7 @@
         </p:nvSpPr>
         <p:spPr>
           <a:xfrm>
-            <a:off x="762000" y="2466975"/>
+            <a:off x="762000" y="2552700"/>
             <a:ext cx="6853238" cy="885825"/>
           </a:xfrm>
           <a:prstGeom prst="rect">
@@ -4344,7 +4344,7 @@
         </p:nvSpPr>
         <p:spPr>
           <a:xfrm>
-            <a:off x="762000" y="3283000"/>
+            <a:off x="762000" y="3368725"/>
             <a:ext cx="8593931" cy="885825"/>
           </a:xfrm>
           <a:prstGeom prst="rect">
@@ -4383,8 +4383,8 @@
         </p:nvSpPr>
         <p:spPr>
           <a:xfrm>
-            <a:off x="1095375" y="6786562"/>
-            <a:ext cx="2124313" cy="257175"/>
+            <a:off x="1114425" y="6772275"/>
+            <a:ext cx="2799636" cy="323850"/>
           </a:xfrm>
           <a:prstGeom prst="rect">
             <a:avLst/>
@@ -4397,7 +4397,7 @@
           <a:p>
             <a:pPr algn="l"/>
             <a:r>
-              <a:rPr sz="1800" i="1" b="0">
+              <a:rPr sz="2250" i="1" b="0">
                 <a:solidFill>
                   <a:srgbClr val="A98BA6"/>
                 </a:solidFill>
@@ -4418,8 +4418,8 @@
         </p:nvSpPr>
         <p:spPr>
           <a:xfrm>
-            <a:off x="1095375" y="7100888"/>
-            <a:ext cx="2124313" cy="114300"/>
+            <a:off x="1114425" y="7191375"/>
+            <a:ext cx="2799636" cy="171450"/>
           </a:xfrm>
           <a:prstGeom prst="rect">
             <a:avLst/>
@@ -4432,7 +4432,7 @@
           <a:p>
             <a:pPr algn="l"/>
             <a:r>
-              <a:rPr sz="825" i="0" b="1" spc="214">
+              <a:rPr sz="1200" i="0" b="1" spc="264">
                 <a:solidFill>
                   <a:srgbClr val="8A8090"/>
                 </a:solidFill>
@@ -4453,7 +4453,7 @@
         </p:nvSpPr>
         <p:spPr>
           <a:xfrm>
-            <a:off x="5748814" y="6581775"/>
+            <a:off x="5729764" y="6619875"/>
             <a:ext cx="3442811" cy="704850"/>
           </a:xfrm>
           <a:prstGeom prst="rect">
@@ -4488,8 +4488,8 @@
         </p:nvSpPr>
         <p:spPr>
           <a:xfrm>
-            <a:off x="5748814" y="7286625"/>
-            <a:ext cx="3442811" cy="133350"/>
+            <a:off x="5729764" y="7324725"/>
+            <a:ext cx="3442811" cy="190500"/>
           </a:xfrm>
           <a:prstGeom prst="rect">
             <a:avLst/>
@@ -4502,7 +4502,7 @@
           <a:p>
             <a:pPr algn="r"/>
             <a:r>
-              <a:rPr sz="900" i="0" b="1">
+              <a:rPr sz="1275" i="0" b="1">
                 <a:solidFill>
                   <a:srgbClr val="A98BA6"/>
                 </a:solidFill>
@@ -4523,8 +4523,8 @@
         </p:nvSpPr>
         <p:spPr>
           <a:xfrm>
-            <a:off x="1095375" y="8424862"/>
-            <a:ext cx="2503408" cy="257175"/>
+            <a:off x="1114425" y="8543925"/>
+            <a:ext cx="3331369" cy="323850"/>
           </a:xfrm>
           <a:prstGeom prst="rect">
             <a:avLst/>
@@ -4537,7 +4537,7 @@
           <a:p>
             <a:pPr algn="l"/>
             <a:r>
-              <a:rPr sz="1800" i="1" b="0">
+              <a:rPr sz="2250" i="1" b="0">
                 <a:solidFill>
                   <a:srgbClr val="A98BA6"/>
                 </a:solidFill>
@@ -4558,8 +4558,8 @@
         </p:nvSpPr>
         <p:spPr>
           <a:xfrm>
-            <a:off x="1095375" y="8739188"/>
-            <a:ext cx="2503408" cy="114300"/>
+            <a:off x="1114425" y="8963025"/>
+            <a:ext cx="3331369" cy="171450"/>
           </a:xfrm>
           <a:prstGeom prst="rect">
             <a:avLst/>
@@ -4572,7 +4572,7 @@
           <a:p>
             <a:pPr algn="l"/>
             <a:r>
-              <a:rPr sz="825" i="0" b="1" spc="214">
+              <a:rPr sz="1200" i="0" b="1" spc="264">
                 <a:solidFill>
                   <a:srgbClr val="8A8090"/>
                 </a:solidFill>
@@ -4593,8 +4593,8 @@
         </p:nvSpPr>
         <p:spPr>
           <a:xfrm>
-            <a:off x="7835265" y="8220075"/>
-            <a:ext cx="1356360" cy="704850"/>
+            <a:off x="7761684" y="8391525"/>
+            <a:ext cx="1410891" cy="704850"/>
           </a:xfrm>
           <a:prstGeom prst="rect">
             <a:avLst/>
@@ -4628,8 +4628,8 @@
         </p:nvSpPr>
         <p:spPr>
           <a:xfrm>
-            <a:off x="7835265" y="8924925"/>
-            <a:ext cx="1356360" cy="133350"/>
+            <a:off x="7761684" y="9096375"/>
+            <a:ext cx="1410891" cy="190500"/>
           </a:xfrm>
           <a:prstGeom prst="rect">
             <a:avLst/>
@@ -4642,7 +4642,7 @@
           <a:p>
             <a:pPr algn="r"/>
             <a:r>
-              <a:rPr sz="900" i="0" b="1">
+              <a:rPr sz="1275" i="0" b="1">
                 <a:solidFill>
                   <a:srgbClr val="A98BA6"/>
                 </a:solidFill>
@@ -4663,8 +4663,8 @@
         </p:nvSpPr>
         <p:spPr>
           <a:xfrm>
-            <a:off x="1095375" y="10063162"/>
-            <a:ext cx="2469356" cy="257175"/>
+            <a:off x="1114425" y="10315575"/>
+            <a:ext cx="3272076" cy="323850"/>
           </a:xfrm>
           <a:prstGeom prst="rect">
             <a:avLst/>
@@ -4677,7 +4677,7 @@
           <a:p>
             <a:pPr algn="l"/>
             <a:r>
-              <a:rPr sz="1800" i="1" b="0">
+              <a:rPr sz="2250" i="1" b="0">
                 <a:solidFill>
                   <a:srgbClr val="A98BA6"/>
                 </a:solidFill>
@@ -4698,8 +4698,8 @@
         </p:nvSpPr>
         <p:spPr>
           <a:xfrm>
-            <a:off x="1095375" y="10377488"/>
-            <a:ext cx="2469356" cy="114300"/>
+            <a:off x="1114425" y="10734675"/>
+            <a:ext cx="3272076" cy="171450"/>
           </a:xfrm>
           <a:prstGeom prst="rect">
             <a:avLst/>
@@ -4712,7 +4712,7 @@
           <a:p>
             <a:pPr algn="l"/>
             <a:r>
-              <a:rPr sz="825" i="0" b="1" spc="214">
+              <a:rPr sz="1200" i="0" b="1" spc="264">
                 <a:solidFill>
                   <a:srgbClr val="8A8090"/>
                 </a:solidFill>
@@ -4733,7 +4733,7 @@
         </p:nvSpPr>
         <p:spPr>
           <a:xfrm>
-            <a:off x="7347585" y="9858375"/>
+            <a:off x="7328535" y="10163175"/>
             <a:ext cx="1844040" cy="704850"/>
           </a:xfrm>
           <a:prstGeom prst="rect">
@@ -4768,8 +4768,8 @@
         </p:nvSpPr>
         <p:spPr>
           <a:xfrm>
-            <a:off x="7347585" y="10563225"/>
-            <a:ext cx="1844040" cy="133350"/>
+            <a:off x="7328535" y="10868025"/>
+            <a:ext cx="1844040" cy="190500"/>
           </a:xfrm>
           <a:prstGeom prst="rect">
             <a:avLst/>
@@ -4782,7 +4782,7 @@
           <a:p>
             <a:pPr algn="r"/>
             <a:r>
-              <a:rPr sz="900" i="0" b="1">
+              <a:rPr sz="1275" i="0" b="1">
                 <a:solidFill>
                   <a:srgbClr val="A98BA6"/>
                 </a:solidFill>
@@ -4803,8 +4803,8 @@
         </p:nvSpPr>
         <p:spPr>
           <a:xfrm>
-            <a:off x="1266825" y="16035338"/>
-            <a:ext cx="4294346" cy="152400"/>
+            <a:off x="1323975" y="15878175"/>
+            <a:ext cx="6382941" cy="247650"/>
           </a:xfrm>
           <a:prstGeom prst="rect">
             <a:avLst/>
@@ -4817,7 +4817,7 @@
           <a:p>
             <a:pPr algn="l"/>
             <a:r>
-              <a:rPr sz="1050" i="0" b="1" spc="231">
+              <a:rPr sz="1650" i="0" b="1" spc="330">
                 <a:solidFill>
                   <a:srgbClr val="332C46"/>
                 </a:solidFill>
@@ -4838,7 +4838,7 @@
         </p:nvSpPr>
         <p:spPr>
           <a:xfrm>
-            <a:off x="3846016" y="16021050"/>
+            <a:off x="5227588" y="15911512"/>
             <a:ext cx="579120" cy="180975"/>
           </a:xfrm>
           <a:prstGeom prst="rect">
@@ -4873,8 +4873,8 @@
         </p:nvSpPr>
         <p:spPr>
           <a:xfrm>
-            <a:off x="-2057400" y="17306925"/>
-            <a:ext cx="14401800" cy="123825"/>
+            <a:off x="-2057400" y="17249775"/>
+            <a:ext cx="14401800" cy="180975"/>
           </a:xfrm>
           <a:prstGeom prst="rect">
             <a:avLst/>
@@ -4887,7 +4887,7 @@
           <a:p>
             <a:pPr algn="ctr"/>
             <a:r>
-              <a:rPr sz="825" i="0" b="1" spc="264">
+              <a:rPr sz="1200" i="0" b="1" spc="360">
                 <a:solidFill>
                   <a:srgbClr val="332C46"/>
                 </a:solidFill>

--- a/coastal-17-market-update.pptx
+++ b/coastal-17-market-update.pptx
@@ -3317,7 +3317,7 @@
         <p:spPr>
           <a:xfrm>
             <a:off x="762000" y="6286500"/>
-            <a:ext cx="8763000" cy="1562100"/>
+            <a:ext cx="8763000" cy="1581150"/>
           </a:xfrm>
           <a:prstGeom prst="rect">
             <a:avLst/>
@@ -3404,7 +3404,7 @@
         </p:nvSpPr>
         <p:spPr>
           <a:xfrm>
-            <a:off x="762000" y="7839075"/>
+            <a:off x="762000" y="7858125"/>
             <a:ext cx="8763000" cy="9525"/>
           </a:xfrm>
           <a:prstGeom prst="rect">
@@ -3449,7 +3449,7 @@
         <p:spPr>
           <a:xfrm>
             <a:off x="762000" y="6286500"/>
-            <a:ext cx="9525" cy="1562100"/>
+            <a:ext cx="9525" cy="1581150"/>
           </a:xfrm>
           <a:prstGeom prst="rect">
             <a:avLst/>
@@ -3493,7 +3493,7 @@
         <p:spPr>
           <a:xfrm>
             <a:off x="9515475" y="6286500"/>
-            <a:ext cx="9525" cy="1562100"/>
+            <a:ext cx="9525" cy="1581150"/>
           </a:xfrm>
           <a:prstGeom prst="rect">
             <a:avLst/>
@@ -3536,8 +3536,8 @@
         </p:nvSpPr>
         <p:spPr>
           <a:xfrm>
-            <a:off x="762000" y="8058150"/>
-            <a:ext cx="8763000" cy="1562100"/>
+            <a:off x="762000" y="8077200"/>
+            <a:ext cx="8763000" cy="1581150"/>
           </a:xfrm>
           <a:prstGeom prst="rect">
             <a:avLst/>
@@ -3580,7 +3580,7 @@
         </p:nvSpPr>
         <p:spPr>
           <a:xfrm>
-            <a:off x="762000" y="8058150"/>
+            <a:off x="762000" y="8077200"/>
             <a:ext cx="8763000" cy="9525"/>
           </a:xfrm>
           <a:prstGeom prst="rect">
@@ -3624,7 +3624,7 @@
         </p:nvSpPr>
         <p:spPr>
           <a:xfrm>
-            <a:off x="762000" y="9610725"/>
+            <a:off x="762000" y="9648825"/>
             <a:ext cx="8763000" cy="9525"/>
           </a:xfrm>
           <a:prstGeom prst="rect">
@@ -3668,8 +3668,8 @@
         </p:nvSpPr>
         <p:spPr>
           <a:xfrm>
-            <a:off x="762000" y="8058150"/>
-            <a:ext cx="9525" cy="1562100"/>
+            <a:off x="762000" y="8077200"/>
+            <a:ext cx="9525" cy="1581150"/>
           </a:xfrm>
           <a:prstGeom prst="rect">
             <a:avLst/>
@@ -3712,8 +3712,8 @@
         </p:nvSpPr>
         <p:spPr>
           <a:xfrm>
-            <a:off x="9515475" y="8058150"/>
-            <a:ext cx="9525" cy="1562100"/>
+            <a:off x="9515475" y="8077200"/>
+            <a:ext cx="9525" cy="1581150"/>
           </a:xfrm>
           <a:prstGeom prst="rect">
             <a:avLst/>
@@ -3756,8 +3756,8 @@
         </p:nvSpPr>
         <p:spPr>
           <a:xfrm>
-            <a:off x="762000" y="9829800"/>
-            <a:ext cx="8763000" cy="1562100"/>
+            <a:off x="762000" y="9867900"/>
+            <a:ext cx="8763000" cy="1581150"/>
           </a:xfrm>
           <a:prstGeom prst="rect">
             <a:avLst/>
@@ -3800,7 +3800,7 @@
         </p:nvSpPr>
         <p:spPr>
           <a:xfrm>
-            <a:off x="762000" y="9829800"/>
+            <a:off x="762000" y="9867900"/>
             <a:ext cx="8763000" cy="9525"/>
           </a:xfrm>
           <a:prstGeom prst="rect">
@@ -3844,7 +3844,7 @@
         </p:nvSpPr>
         <p:spPr>
           <a:xfrm>
-            <a:off x="762000" y="11382375"/>
+            <a:off x="762000" y="11439525"/>
             <a:ext cx="8763000" cy="9525"/>
           </a:xfrm>
           <a:prstGeom prst="rect">
@@ -3888,8 +3888,8 @@
         </p:nvSpPr>
         <p:spPr>
           <a:xfrm>
-            <a:off x="762000" y="9829800"/>
-            <a:ext cx="9525" cy="1562100"/>
+            <a:off x="762000" y="9867900"/>
+            <a:ext cx="9525" cy="1581150"/>
           </a:xfrm>
           <a:prstGeom prst="rect">
             <a:avLst/>
@@ -3932,8 +3932,8 @@
         </p:nvSpPr>
         <p:spPr>
           <a:xfrm>
-            <a:off x="9515475" y="9829800"/>
-            <a:ext cx="9525" cy="1562100"/>
+            <a:off x="9515475" y="9867900"/>
+            <a:ext cx="9525" cy="1581150"/>
           </a:xfrm>
           <a:prstGeom prst="rect">
             <a:avLst/>
@@ -3976,8 +3976,8 @@
         </p:nvSpPr>
         <p:spPr>
           <a:xfrm>
-            <a:off x="762000" y="15621000"/>
-            <a:ext cx="4922788" cy="9525"/>
+            <a:off x="762000" y="15516225"/>
+            <a:ext cx="5833616" cy="9525"/>
           </a:xfrm>
           <a:prstGeom prst="rect">
             <a:avLst/>
@@ -4021,7 +4021,7 @@
         <p:spPr>
           <a:xfrm>
             <a:off x="762000" y="16373475"/>
-            <a:ext cx="4922788" cy="9525"/>
+            <a:ext cx="5833616" cy="9525"/>
           </a:xfrm>
           <a:prstGeom prst="rect">
             <a:avLst/>
@@ -4064,8 +4064,8 @@
         </p:nvSpPr>
         <p:spPr>
           <a:xfrm>
-            <a:off x="762000" y="15621000"/>
-            <a:ext cx="9525" cy="762000"/>
+            <a:off x="762000" y="15516225"/>
+            <a:ext cx="9525" cy="866775"/>
           </a:xfrm>
           <a:prstGeom prst="rect">
             <a:avLst/>
@@ -4108,8 +4108,8 @@
         </p:nvSpPr>
         <p:spPr>
           <a:xfrm>
-            <a:off x="5675263" y="15621000"/>
-            <a:ext cx="9525" cy="762000"/>
+            <a:off x="6586091" y="15516225"/>
+            <a:ext cx="9525" cy="866775"/>
           </a:xfrm>
           <a:prstGeom prst="rect">
             <a:avLst/>
@@ -4152,7 +4152,7 @@
         </p:nvSpPr>
         <p:spPr>
           <a:xfrm>
-            <a:off x="1079593" y="15948118"/>
+            <a:off x="1117693" y="15895731"/>
             <a:ext cx="107763" cy="107763"/>
           </a:xfrm>
           <a:prstGeom prst="rect">
@@ -4235,8 +4235,8 @@
         </p:nvSpPr>
         <p:spPr>
           <a:xfrm>
-            <a:off x="6257032" y="904875"/>
-            <a:ext cx="5609749" cy="171450"/>
+            <a:off x="5818138" y="885825"/>
+            <a:ext cx="6311979" cy="209550"/>
           </a:xfrm>
           <a:prstGeom prst="rect">
             <a:avLst/>
@@ -4249,7 +4249,7 @@
           <a:p>
             <a:pPr algn="l"/>
             <a:r>
-              <a:rPr sz="1200" i="0" b="1" spc="360">
+              <a:rPr sz="1425" i="0" b="1" spc="370">
                 <a:solidFill>
                   <a:srgbClr val="332C46"/>
                 </a:solidFill>
@@ -4271,7 +4271,7 @@
         <p:spPr>
           <a:xfrm>
             <a:off x="762000" y="2190750"/>
-            <a:ext cx="14401800" cy="228600"/>
+            <a:ext cx="14401800" cy="247650"/>
           </a:xfrm>
           <a:prstGeom prst="rect">
             <a:avLst/>
@@ -4284,7 +4284,7 @@
           <a:p>
             <a:pPr algn="l"/>
             <a:r>
-              <a:rPr sz="1575" i="0" b="1" spc="472">
+              <a:rPr sz="1650" i="0" b="1" spc="462">
                 <a:solidFill>
                   <a:srgbClr val="A98BA6"/>
                 </a:solidFill>
@@ -4305,7 +4305,7 @@
         </p:nvSpPr>
         <p:spPr>
           <a:xfrm>
-            <a:off x="762000" y="2552700"/>
+            <a:off x="762000" y="2571750"/>
             <a:ext cx="6853238" cy="885825"/>
           </a:xfrm>
           <a:prstGeom prst="rect">
@@ -4344,7 +4344,7 @@
         </p:nvSpPr>
         <p:spPr>
           <a:xfrm>
-            <a:off x="762000" y="3368725"/>
+            <a:off x="762000" y="3387775"/>
             <a:ext cx="8593931" cy="885825"/>
           </a:xfrm>
           <a:prstGeom prst="rect">
@@ -4383,8 +4383,8 @@
         </p:nvSpPr>
         <p:spPr>
           <a:xfrm>
-            <a:off x="1114425" y="6772275"/>
-            <a:ext cx="2799636" cy="323850"/>
+            <a:off x="1114425" y="6753225"/>
+            <a:ext cx="3183493" cy="323850"/>
           </a:xfrm>
           <a:prstGeom prst="rect">
             <a:avLst/>
@@ -4419,7 +4419,7 @@
         <p:spPr>
           <a:xfrm>
             <a:off x="1114425" y="7191375"/>
-            <a:ext cx="2799636" cy="171450"/>
+            <a:ext cx="3183493" cy="209550"/>
           </a:xfrm>
           <a:prstGeom prst="rect">
             <a:avLst/>
@@ -4432,7 +4432,7 @@
           <a:p>
             <a:pPr algn="l"/>
             <a:r>
-              <a:rPr sz="1200" i="0" b="1" spc="264">
+              <a:rPr sz="1425" i="0" b="1" spc="285">
                 <a:solidFill>
                   <a:srgbClr val="8A8090"/>
                 </a:solidFill>
@@ -4489,7 +4489,7 @@
         <p:spPr>
           <a:xfrm>
             <a:off x="5729764" y="7324725"/>
-            <a:ext cx="3442811" cy="190500"/>
+            <a:ext cx="3442811" cy="209550"/>
           </a:xfrm>
           <a:prstGeom prst="rect">
             <a:avLst/>
@@ -4502,7 +4502,7 @@
           <a:p>
             <a:pPr algn="r"/>
             <a:r>
-              <a:rPr sz="1275" i="0" b="1">
+              <a:rPr sz="1425" i="0" b="1">
                 <a:solidFill>
                   <a:srgbClr val="A98BA6"/>
                 </a:solidFill>
@@ -4524,7 +4524,7 @@
         <p:spPr>
           <a:xfrm>
             <a:off x="1114425" y="8543925"/>
-            <a:ext cx="3331369" cy="323850"/>
+            <a:ext cx="3803571" cy="323850"/>
           </a:xfrm>
           <a:prstGeom prst="rect">
             <a:avLst/>
@@ -4558,8 +4558,8 @@
         </p:nvSpPr>
         <p:spPr>
           <a:xfrm>
-            <a:off x="1114425" y="8963025"/>
-            <a:ext cx="3331369" cy="171450"/>
+            <a:off x="1114425" y="8982075"/>
+            <a:ext cx="3803571" cy="209550"/>
           </a:xfrm>
           <a:prstGeom prst="rect">
             <a:avLst/>
@@ -4572,7 +4572,7 @@
           <a:p>
             <a:pPr algn="l"/>
             <a:r>
-              <a:rPr sz="1200" i="0" b="1" spc="264">
+              <a:rPr sz="1425" i="0" b="1" spc="285">
                 <a:solidFill>
                   <a:srgbClr val="8A8090"/>
                 </a:solidFill>
@@ -4593,8 +4593,8 @@
         </p:nvSpPr>
         <p:spPr>
           <a:xfrm>
-            <a:off x="7761684" y="8391525"/>
-            <a:ext cx="1410891" cy="704850"/>
+            <a:off x="7640479" y="8410575"/>
+            <a:ext cx="1532096" cy="704850"/>
           </a:xfrm>
           <a:prstGeom prst="rect">
             <a:avLst/>
@@ -4628,8 +4628,8 @@
         </p:nvSpPr>
         <p:spPr>
           <a:xfrm>
-            <a:off x="7761684" y="9096375"/>
-            <a:ext cx="1410891" cy="190500"/>
+            <a:off x="7640479" y="9115425"/>
+            <a:ext cx="1532096" cy="209550"/>
           </a:xfrm>
           <a:prstGeom prst="rect">
             <a:avLst/>
@@ -4642,7 +4642,7 @@
           <a:p>
             <a:pPr algn="r"/>
             <a:r>
-              <a:rPr sz="1275" i="0" b="1">
+              <a:rPr sz="1425" i="0" b="1">
                 <a:solidFill>
                   <a:srgbClr val="A98BA6"/>
                 </a:solidFill>
@@ -4663,8 +4663,8 @@
         </p:nvSpPr>
         <p:spPr>
           <a:xfrm>
-            <a:off x="1114425" y="10315575"/>
-            <a:ext cx="3272076" cy="323850"/>
+            <a:off x="1114425" y="10334625"/>
+            <a:ext cx="3727371" cy="323850"/>
           </a:xfrm>
           <a:prstGeom prst="rect">
             <a:avLst/>
@@ -4698,8 +4698,8 @@
         </p:nvSpPr>
         <p:spPr>
           <a:xfrm>
-            <a:off x="1114425" y="10734675"/>
-            <a:ext cx="3272076" cy="171450"/>
+            <a:off x="1114425" y="10772775"/>
+            <a:ext cx="3727371" cy="209550"/>
           </a:xfrm>
           <a:prstGeom prst="rect">
             <a:avLst/>
@@ -4712,7 +4712,7 @@
           <a:p>
             <a:pPr algn="l"/>
             <a:r>
-              <a:rPr sz="1200" i="0" b="1" spc="264">
+              <a:rPr sz="1425" i="0" b="1" spc="285">
                 <a:solidFill>
                   <a:srgbClr val="8A8090"/>
                 </a:solidFill>
@@ -4733,7 +4733,7 @@
         </p:nvSpPr>
         <p:spPr>
           <a:xfrm>
-            <a:off x="7328535" y="10163175"/>
+            <a:off x="7328535" y="10201275"/>
             <a:ext cx="1844040" cy="704850"/>
           </a:xfrm>
           <a:prstGeom prst="rect">
@@ -4768,8 +4768,8 @@
         </p:nvSpPr>
         <p:spPr>
           <a:xfrm>
-            <a:off x="7328535" y="10868025"/>
-            <a:ext cx="1844040" cy="190500"/>
+            <a:off x="7328535" y="10906125"/>
+            <a:ext cx="1844040" cy="209550"/>
           </a:xfrm>
           <a:prstGeom prst="rect">
             <a:avLst/>
@@ -4782,7 +4782,7 @@
           <a:p>
             <a:pPr algn="r"/>
             <a:r>
-              <a:rPr sz="1275" i="0" b="1">
+              <a:rPr sz="1425" i="0" b="1">
                 <a:solidFill>
                   <a:srgbClr val="A98BA6"/>
                 </a:solidFill>
@@ -4803,8 +4803,8 @@
         </p:nvSpPr>
         <p:spPr>
           <a:xfrm>
-            <a:off x="1323975" y="15878175"/>
-            <a:ext cx="6382941" cy="247650"/>
+            <a:off x="1362075" y="15801975"/>
+            <a:ext cx="7565946" cy="295275"/>
           </a:xfrm>
           <a:prstGeom prst="rect">
             <a:avLst/>
@@ -4817,7 +4817,7 @@
           <a:p>
             <a:pPr algn="l"/>
             <a:r>
-              <a:rPr sz="1650" i="0" b="1" spc="330">
+              <a:rPr sz="2025" i="0" b="1" spc="364">
                 <a:solidFill>
                   <a:srgbClr val="332C46"/>
                 </a:solidFill>
@@ -4838,8 +4838,8 @@
         </p:nvSpPr>
         <p:spPr>
           <a:xfrm>
-            <a:off x="5227588" y="15911512"/>
-            <a:ext cx="579120" cy="180975"/>
+            <a:off x="6005066" y="15792450"/>
+            <a:ext cx="731520" cy="314325"/>
           </a:xfrm>
           <a:prstGeom prst="rect">
             <a:avLst/>
@@ -4852,7 +4852,7 @@
           <a:p>
             <a:pPr algn="l"/>
             <a:r>
-              <a:rPr sz="1200" i="0" b="0">
+              <a:rPr sz="2100" i="0" b="0">
                 <a:solidFill>
                   <a:srgbClr val="A98BA6"/>
                 </a:solidFill>
@@ -4873,8 +4873,8 @@
         </p:nvSpPr>
         <p:spPr>
           <a:xfrm>
-            <a:off x="-2057400" y="17249775"/>
-            <a:ext cx="14401800" cy="180975"/>
+            <a:off x="-2057400" y="17211675"/>
+            <a:ext cx="14401800" cy="219075"/>
           </a:xfrm>
           <a:prstGeom prst="rect">
             <a:avLst/>
@@ -4887,7 +4887,7 @@
           <a:p>
             <a:pPr algn="ctr"/>
             <a:r>
-              <a:rPr sz="1200" i="0" b="1" spc="360">
+              <a:rPr sz="1425" i="0" b="1" spc="370">
                 <a:solidFill>
                   <a:srgbClr val="332C46"/>
                 </a:solidFill>
